--- a/classes/parte-13-seguridad-movil-iot-e-inalambrica/272-ataques-wifi-avanzados-evil-twin-y-pmkid/clase-272-presentacion.pptx
+++ b/classes/parte-13-seguridad-movil-iot-e-inalambrica/272-ataques-wifi-avanzados-evil-twin-y-pmkid/clase-272-presentacion.pptx
@@ -21,6 +21,7 @@
     <p:sldId id="269" r:id="rId20"/>
     <p:sldId id="270" r:id="rId21"/>
     <p:sldId id="271" r:id="rId22"/>
+    <p:sldId id="272" r:id="rId23"/>
   </p:sldIdLst>
   <p:sldSz cx="9144000" cy="6858000" type="screen4x3"/>
   <p:notesSz cx="6858000" cy="9144000"/>
@@ -3131,7 +3132,7 @@
                   <a:srgbClr val="0B3D2E"/>
                 </a:solidFill>
               </a:rPr>
-              <a:t>Clase 272 — Ataques WiFi avanzados: Evil Twin y PMKID</a:t>
+              <a:t>Clase 272 — Auditoría WiFi avanzada: Evil Twin, PMKID y defensa</a:t>
             </a:r>
           </a:p>
           <a:p>
@@ -3202,7 +3203,7 @@
                   <a:srgbClr val="0B3D2E"/>
                 </a:solidFill>
               </a:rPr>
-              <a:t>🧪 Laboratorio guiado</a:t>
+              <a:t>🧪 Laboratorio guiado — Gemelo inocuo y control medible</a:t>
             </a:r>
           </a:p>
         </p:txBody>
@@ -3240,97 +3241,97 @@
                   <a:srgbClr val="22282E"/>
                 </a:solidFill>
               </a:rPr>
-              <a:t>•  Prepara el laboratorio: configura tu propio AP con WPA2-PSK y una contraseña de prueba que esté en tu diccionario.</a:t>
-            </a:r>
-          </a:p>
-          <a:p>
-            <a:pPr>
-              <a:spcAft>
-                <a:spcPts val="600"/>
-              </a:spcAft>
-            </a:pPr>
-            <a:r>
-              <a:rPr sz="1500">
-                <a:solidFill>
-                  <a:srgbClr val="22282E"/>
-                </a:solidFill>
-              </a:rPr>
-              <a:t>•  Modo monitor: activa airmon-ng y localiza tu AP y su canal con airodump-ng.</a:t>
-            </a:r>
-          </a:p>
-          <a:p>
-            <a:pPr>
-              <a:spcAft>
-                <a:spcPts val="600"/>
-              </a:spcAft>
-            </a:pPr>
-            <a:r>
-              <a:rPr sz="1500">
-                <a:solidFill>
-                  <a:srgbClr val="22282E"/>
-                </a:solidFill>
-              </a:rPr>
-              <a:t>•  Captura el handshake: filtra por tu BSSID y canal y reconecta manualmente tu cliente. No transmitas tramas de desautenticación, que pueden afectar equipos cercanos.</a:t>
-            </a:r>
-          </a:p>
-          <a:p>
-            <a:pPr>
-              <a:spcAft>
-                <a:spcPts val="600"/>
-              </a:spcAft>
-            </a:pPr>
-            <a:r>
-              <a:rPr sz="1500">
-                <a:solidFill>
-                  <a:srgbClr val="22282E"/>
-                </a:solidFill>
-              </a:rPr>
-              <a:t>•  Captura el PMKID: con hcxdumptool obtén el PMKID de tu AP sin clientes y conviértelo a .hc22000.</a:t>
-            </a:r>
-          </a:p>
-          <a:p>
-            <a:pPr>
-              <a:spcAft>
-                <a:spcPts val="600"/>
-              </a:spcAft>
-            </a:pPr>
-            <a:r>
-              <a:rPr sz="1500">
-                <a:solidFill>
-                  <a:srgbClr val="22282E"/>
-                </a:solidFill>
-              </a:rPr>
-              <a:t>•  Crackea offline: usa hashcat modo 22000 con un diccionario; recupera la contraseña de prueba.</a:t>
-            </a:r>
-          </a:p>
-          <a:p>
-            <a:pPr>
-              <a:spcAft>
-                <a:spcPts val="600"/>
-              </a:spcAft>
-            </a:pPr>
-            <a:r>
-              <a:rPr sz="1500">
-                <a:solidFill>
-                  <a:srgbClr val="22282E"/>
-                </a:solidFill>
-              </a:rPr>
-              <a:t>•  Evil Twin: con hostapd/wifiphisher levanta un AP con el mismo SSID y un portal cautivo en laboratorio aislado; observa el flujo de captura de credenciales con un cliente de pruebas propio.</a:t>
-            </a:r>
-          </a:p>
-          <a:p>
-            <a:pPr>
-              <a:spcAft>
-                <a:spcPts val="600"/>
-              </a:spcAft>
-            </a:pPr>
-            <a:r>
-              <a:rPr sz="1500">
-                <a:solidFill>
-                  <a:srgbClr val="22282E"/>
-                </a:solidFill>
-              </a:rPr>
-              <a:t>•  Compara con WPA3: reconfigura el AP a WPA3-SAE e intenta el mismo ataque; constata que el crackeo offline ya no aplica.</a:t>
+              <a:t>•  Objetivo. Demostrar que confiar solo en SSID induce una conexión equivocada y que un perfil seguro la impide.</a:t>
+            </a:r>
+          </a:p>
+          <a:p>
+            <a:pPr>
+              <a:spcAft>
+                <a:spcPts val="600"/>
+              </a:spcAft>
+            </a:pPr>
+            <a:r>
+              <a:rPr sz="1500">
+                <a:solidFill>
+                  <a:srgbClr val="22282E"/>
+                </a:solidFill>
+              </a:rPr>
+              <a:t>•  Prerrequisitos. Clases 025, 036–040 y 026; dos AP propios; cliente restaurable; consentimiento; ausencia de terceros en el banco.</a:t>
+            </a:r>
+          </a:p>
+          <a:p>
+            <a:pPr>
+              <a:spcAft>
+                <a:spcPts val="600"/>
+              </a:spcAft>
+            </a:pPr>
+            <a:r>
+              <a:rPr sz="1500">
+                <a:solidFill>
+                  <a:srgbClr val="22282E"/>
+                </a:solidFill>
+              </a:rPr>
+              <a:t>•  Topología. AP-A legítimo LAB-SECURE → servicio local 10.20.0.10; AP-B de auditoría → portal estático «LAB AUTORIZADO, NO INGRESE DATOS» sin formularios ni Internet; sensor monitor; cliente propio.</a:t>
+            </a:r>
+          </a:p>
+          <a:p>
+            <a:pPr>
+              <a:spcAft>
+                <a:spcPts val="600"/>
+              </a:spcAft>
+            </a:pPr>
+            <a:r>
+              <a:rPr sz="1500">
+                <a:solidFill>
+                  <a:srgbClr val="22282E"/>
+                </a:solidFill>
+              </a:rPr>
+              <a:t>•  Procedimiento.</a:t>
+            </a:r>
+          </a:p>
+          <a:p>
+            <a:pPr>
+              <a:spcAft>
+                <a:spcPts val="600"/>
+              </a:spcAft>
+            </a:pPr>
+            <a:r>
+              <a:rPr sz="1500">
+                <a:solidFill>
+                  <a:srgbClr val="22282E"/>
+                </a:solidFill>
+              </a:rPr>
+              <a:t>•  Documenta modelo, firmware, país, canales, potencias, BSSID, RSN y credenciales sintéticas. Verifica que ningún AP enruta fuera del laboratorio.</a:t>
+            </a:r>
+          </a:p>
+          <a:p>
+            <a:pPr>
+              <a:spcAft>
+                <a:spcPts val="600"/>
+              </a:spcAft>
+            </a:pPr>
+            <a:r>
+              <a:rPr sz="1500">
+                <a:solidFill>
+                  <a:srgbClr val="22282E"/>
+                </a:solidFill>
+              </a:rPr>
+              <a:t>•  Configura AP-A y conecta manualmente el cliente. Captura beacons y asociación; exporta el perfil/estado esperado.</a:t>
+            </a:r>
+          </a:p>
+          <a:p>
+            <a:pPr>
+              <a:spcAft>
+                <a:spcPts val="600"/>
+              </a:spcAft>
+            </a:pPr>
+            <a:r>
+              <a:rPr sz="1500">
+                <a:solidFill>
+                  <a:srgbClr val="22282E"/>
+                </a:solidFill>
+              </a:rPr>
+              <a:t>•  Configura AP-B con el mismo SSID solo dentro del banco, pero con un BSSID controlado y portal inocuo. Deshabilita captura de credenciales y funciones de deauth.</a:t>
             </a:r>
           </a:p>
         </p:txBody>
@@ -3381,7 +3382,7 @@
                   <a:srgbClr val="0B3D2E"/>
                 </a:solidFill>
               </a:rPr>
-              <a:t>✍️ Ejercicios</a:t>
+              <a:t>🔍 Caso integrador — De radio a respuesta</a:t>
             </a:r>
           </a:p>
         </p:txBody>
@@ -3419,82 +3420,7 @@
                   <a:srgbClr val="22282E"/>
                 </a:solidFill>
               </a:rPr>
-              <a:t>•  Pon tu adaptador en modo monitor y lista las redes de tu entorno de laboratorio.</a:t>
-            </a:r>
-          </a:p>
-          <a:p>
-            <a:pPr>
-              <a:spcAft>
-                <a:spcPts val="600"/>
-              </a:spcAft>
-            </a:pPr>
-            <a:r>
-              <a:rPr sz="1500">
-                <a:solidFill>
-                  <a:srgbClr val="22282E"/>
-                </a:solidFill>
-              </a:rPr>
-              <a:t>•  Captura un handshake de 4 vías de tu propia red.</a:t>
-            </a:r>
-          </a:p>
-          <a:p>
-            <a:pPr>
-              <a:spcAft>
-                <a:spcPts val="600"/>
-              </a:spcAft>
-            </a:pPr>
-            <a:r>
-              <a:rPr sz="1500">
-                <a:solidFill>
-                  <a:srgbClr val="22282E"/>
-                </a:solidFill>
-              </a:rPr>
-              <a:t>•  Obtén el PMKID de tu AP y conviértelo al formato de hashcat.</a:t>
-            </a:r>
-          </a:p>
-          <a:p>
-            <a:pPr>
-              <a:spcAft>
-                <a:spcPts val="600"/>
-              </a:spcAft>
-            </a:pPr>
-            <a:r>
-              <a:rPr sz="1500">
-                <a:solidFill>
-                  <a:srgbClr val="22282E"/>
-                </a:solidFill>
-              </a:rPr>
-              <a:t>•  Crackea el hash con un diccionario y mide el tiempo.</a:t>
-            </a:r>
-          </a:p>
-          <a:p>
-            <a:pPr>
-              <a:spcAft>
-                <a:spcPts val="600"/>
-              </a:spcAft>
-            </a:pPr>
-            <a:r>
-              <a:rPr sz="1500">
-                <a:solidFill>
-                  <a:srgbClr val="22282E"/>
-                </a:solidFill>
-              </a:rPr>
-              <a:t>•  Levanta un Evil Twin con portal cautivo en laboratorio.</a:t>
-            </a:r>
-          </a:p>
-          <a:p>
-            <a:pPr>
-              <a:spcAft>
-                <a:spcPts val="600"/>
-              </a:spcAft>
-            </a:pPr>
-            <a:r>
-              <a:rPr sz="1500">
-                <a:solidFill>
-                  <a:srgbClr val="22282E"/>
-                </a:solidFill>
-              </a:rPr>
-              <a:t>•  Repite el ataque contra WPA3 y explica por qué falla.</a:t>
+              <a:t>•  El SOC detecta CORP-WIFI con BSSID no inventariado y RSN WPA2-Personal, mientras la red oficial usa WPA2-Enterprise. Un cliente gestionado registra rechazo de certificado y el switch no conoce la MAC…</a:t>
             </a:r>
           </a:p>
         </p:txBody>
@@ -3545,7 +3471,7 @@
                   <a:srgbClr val="0B3D2E"/>
                 </a:solidFill>
               </a:rPr>
-              <a:t>📝 Reto verificable</a:t>
+              <a:t>✍️ Ejercicios</a:t>
             </a:r>
           </a:p>
         </p:txBody>
@@ -3583,7 +3509,82 @@
                   <a:srgbClr val="22282E"/>
                 </a:solidFill>
               </a:rPr>
-              <a:t>•  Sobre tu propia red WPA2, captura el PMKID, conviértelo y recupera la contraseña con hashcat. Criterio de aceptación: hashcat muestra la clave crackeada correspondiente a la contraseña que…</a:t>
+              <a:t>•  Explica por qué BSSID no es identidad criptográfica y aun así es útil.</a:t>
+            </a:r>
+          </a:p>
+          <a:p>
+            <a:pPr>
+              <a:spcAft>
+                <a:spcPts val="600"/>
+              </a:spcAft>
+            </a:pPr>
+            <a:r>
+              <a:rPr sz="1500">
+                <a:solidFill>
+                  <a:srgbClr val="22282E"/>
+                </a:solidFill>
+              </a:rPr>
+              <a:t>•  Distingue «capturé handshake», «verifiqué una candidata» y «leí tráfico de aplicación».</a:t>
+            </a:r>
+          </a:p>
+          <a:p>
+            <a:pPr>
+              <a:spcAft>
+                <a:spcPts val="600"/>
+              </a:spcAft>
+            </a:pPr>
+            <a:r>
+              <a:rPr sz="1500">
+                <a:solidFill>
+                  <a:srgbClr val="22282E"/>
+                </a:solidFill>
+              </a:rPr>
+              <a:t>•  Compara AP software, WiFi Pineapple y WIDS como objetivo, herramienta y control.</a:t>
+            </a:r>
+          </a:p>
+          <a:p>
+            <a:pPr>
+              <a:spcAft>
+                <a:spcPts val="600"/>
+              </a:spcAft>
+            </a:pPr>
+            <a:r>
+              <a:rPr sz="1500">
+                <a:solidFill>
+                  <a:srgbClr val="22282E"/>
+                </a:solidFill>
+              </a:rPr>
+              <a:t>•  Diseña una regla para SSID corporativo con RSN inesperado usando un esquema de captura dado.</a:t>
+            </a:r>
+          </a:p>
+          <a:p>
+            <a:pPr>
+              <a:spcAft>
+                <a:spcPts val="600"/>
+              </a:spcAft>
+            </a:pPr>
+            <a:r>
+              <a:rPr sz="1500">
+                <a:solidFill>
+                  <a:srgbClr val="22282E"/>
+                </a:solidFill>
+              </a:rPr>
+              <a:t>•  Enumera falsos negativos de un sensor que salta canales.</a:t>
+            </a:r>
+          </a:p>
+          <a:p>
+            <a:pPr>
+              <a:spcAft>
+                <a:spcPts val="600"/>
+              </a:spcAft>
+            </a:pPr>
+            <a:r>
+              <a:rPr sz="1500">
+                <a:solidFill>
+                  <a:srgbClr val="22282E"/>
+                </a:solidFill>
+              </a:rPr>
+              <a:t>•  Redacta respuesta a un rogue AP sin deauth ni interferencia.</a:t>
             </a:r>
           </a:p>
         </p:txBody>
@@ -3634,7 +3635,7 @@
                   <a:srgbClr val="0B3D2E"/>
                 </a:solidFill>
               </a:rPr>
-              <a:t>⚠️ Errores comunes</a:t>
+              <a:t>📝 Reto verificable</a:t>
             </a:r>
           </a:p>
         </p:txBody>
@@ -3672,67 +3673,22 @@
                   <a:srgbClr val="22282E"/>
                 </a:solidFill>
               </a:rPr>
-              <a:t>•  No entra en modo monitor — Chipset sin soporte; usa un adaptador compatible y mata procesos con airmon-ng check kill</a:t>
-            </a:r>
-          </a:p>
-          <a:p>
-            <a:pPr>
-              <a:spcAft>
-                <a:spcPts val="600"/>
-              </a:spcAft>
-            </a:pPr>
-            <a:r>
-              <a:rPr sz="1500">
-                <a:solidFill>
-                  <a:srgbClr val="22282E"/>
-                </a:solidFill>
-              </a:rPr>
-              <a:t>•  Handshake no válido — Captura incompleta; asegura los 4 mensajes EAPOL o usa PMKID</a:t>
-            </a:r>
-          </a:p>
-          <a:p>
-            <a:pPr>
-              <a:spcAft>
-                <a:spcPts val="600"/>
-              </a:spcAft>
-            </a:pPr>
-            <a:r>
-              <a:rPr sz="1500">
-                <a:solidFill>
-                  <a:srgbClr val="22282E"/>
-                </a:solidFill>
-              </a:rPr>
-              <a:t>•  PMKID vacío — El AP no lo expone o usa WPA3; prueba el handshake tradicional</a:t>
-            </a:r>
-          </a:p>
-          <a:p>
-            <a:pPr>
-              <a:spcAft>
-                <a:spcPts val="600"/>
-              </a:spcAft>
-            </a:pPr>
-            <a:r>
-              <a:rPr sz="1500">
-                <a:solidFill>
-                  <a:srgbClr val="22282E"/>
-                </a:solidFill>
-              </a:rPr>
-              <a:t>•  hashcat muy lento — Diccionario/hardware; usa GPU y reglas, o un diccionario dirigido</a:t>
-            </a:r>
-          </a:p>
-          <a:p>
-            <a:pPr>
-              <a:spcAft>
-                <a:spcPts val="600"/>
-              </a:spcAft>
-            </a:pPr>
-            <a:r>
-              <a:rPr sz="1500">
-                <a:solidFill>
-                  <a:srgbClr val="22282E"/>
-                </a:solidFill>
-              </a:rPr>
-              <a:t>•  Evil Twin sin clientes — Señal débil o PMF activo; ajusta potencia en tu laboratorio aislado</a:t>
+              <a:t>•  Entrega topología, inventario, PCAPNG, análisis de selección, validación de perfil/certificado, regla WIDS, prueba offline sintética, respuesta y restauración.</a:t>
+            </a:r>
+          </a:p>
+          <a:p>
+            <a:pPr>
+              <a:spcAft>
+                <a:spcPts val="600"/>
+              </a:spcAft>
+            </a:pPr>
+            <a:r>
+              <a:rPr sz="1500">
+                <a:solidFill>
+                  <a:srgbClr val="22282E"/>
+                </a:solidFill>
+              </a:rPr>
+              <a:t>•  Criterio de aceptación: no hay terceros, deauth, Internet ni recolección de credenciales; las afirmaciones distinguen captura/asociación/contenido; el control bloquea AP-B y conserva AP-A; y el…</a:t>
             </a:r>
           </a:p>
         </p:txBody>
@@ -3783,7 +3739,7 @@
                   <a:srgbClr val="0B3D2E"/>
                 </a:solidFill>
               </a:rPr>
-              <a:t>❓ Preguntas frecuentes</a:t>
+              <a:t>⚠️ Errores comunes</a:t>
             </a:r>
           </a:p>
         </p:txBody>
@@ -3821,82 +3777,97 @@
                   <a:srgbClr val="22282E"/>
                 </a:solidFill>
               </a:rPr>
-              <a:t>•  ❓ ¿El ataque PMKID necesita clientes conectados?</a:t>
-            </a:r>
-          </a:p>
-          <a:p>
-            <a:pPr>
-              <a:spcAft>
-                <a:spcPts val="600"/>
-              </a:spcAft>
-            </a:pPr>
-            <a:r>
-              <a:rPr sz="1500">
-                <a:solidFill>
-                  <a:srgbClr val="22282E"/>
-                </a:solidFill>
-              </a:rPr>
-              <a:t>•  No: esa es su ventaja. Se obtiene directamente del AP si este incluye el PMKID, permitiendo crackeo offline sin esperar a un handshake.</a:t>
-            </a:r>
-          </a:p>
-          <a:p>
-            <a:pPr>
-              <a:spcAft>
-                <a:spcPts val="600"/>
-              </a:spcAft>
-            </a:pPr>
-            <a:r>
-              <a:rPr sz="1500">
-                <a:solidFill>
-                  <a:srgbClr val="22282E"/>
-                </a:solidFill>
-              </a:rPr>
-              <a:t>•  ❓ ¿WPA3 es inmune a todo esto?</a:t>
-            </a:r>
-          </a:p>
-          <a:p>
-            <a:pPr>
-              <a:spcAft>
-                <a:spcPts val="600"/>
-              </a:spcAft>
-            </a:pPr>
-            <a:r>
-              <a:rPr sz="1500">
-                <a:solidFill>
-                  <a:srgbClr val="22282E"/>
-                </a:solidFill>
-              </a:rPr>
-              <a:t>•  SAE evita la verificación offline pasiva propia de WPA2-PSK a partir de una captura equivalente, pero contraseñas débiles, modo transición, configuración e implementación siguen importando. La…</a:t>
-            </a:r>
-          </a:p>
-          <a:p>
-            <a:pPr>
-              <a:spcAft>
-                <a:spcPts val="600"/>
-              </a:spcAft>
-            </a:pPr>
-            <a:r>
-              <a:rPr sz="1500">
-                <a:solidFill>
-                  <a:srgbClr val="22282E"/>
-                </a:solidFill>
-              </a:rPr>
-              <a:t>•  ❓ ¿Por qué el Evil Twin funciona incluso con WPA2 fuerte?</a:t>
-            </a:r>
-          </a:p>
-          <a:p>
-            <a:pPr>
-              <a:spcAft>
-                <a:spcPts val="600"/>
-              </a:spcAft>
-            </a:pPr>
-            <a:r>
-              <a:rPr sz="1500">
-                <a:solidFill>
-                  <a:srgbClr val="22282E"/>
-                </a:solidFill>
-              </a:rPr>
-              <a:t>•  Porque ataca al usuario, no al cifrado: si la víctima se conecta al AP falso e introduce credenciales en un portal, la fortaleza del cifrado del AP legítimo es irrelevante. PMF y verificación de…</a:t>
+              <a:t>•  Error — Por qué falla</a:t>
+            </a:r>
+          </a:p>
+          <a:p>
+            <a:pPr>
+              <a:spcAft>
+                <a:spcPts val="600"/>
+              </a:spcAft>
+            </a:pPr>
+            <a:r>
+              <a:rPr sz="1500">
+                <a:solidFill>
+                  <a:srgbClr val="22282E"/>
+                </a:solidFill>
+              </a:rPr>
+              <a:t>•  «Mismo SSID = misma red» — el nombre no autentica operador</a:t>
+            </a:r>
+          </a:p>
+          <a:p>
+            <a:pPr>
+              <a:spcAft>
+                <a:spcPts val="600"/>
+              </a:spcAft>
+            </a:pPr>
+            <a:r>
+              <a:rPr sz="1500">
+                <a:solidFill>
+                  <a:srgbClr val="22282E"/>
+                </a:solidFill>
+              </a:rPr>
+              <a:t>•  «Tengo PCAP, veo todo» — canal, pérdida y cifrado limitan</a:t>
+            </a:r>
+          </a:p>
+          <a:p>
+            <a:pPr>
+              <a:spcAft>
+                <a:spcPts val="600"/>
+              </a:spcAft>
+            </a:pPr>
+            <a:r>
+              <a:rPr sz="1500">
+                <a:solidFill>
+                  <a:srgbClr val="22282E"/>
+                </a:solidFill>
+              </a:rPr>
+              <a:t>•  Deauth para obtener handshake — afecta disponibilidad y puede ser ilegal</a:t>
+            </a:r>
+          </a:p>
+          <a:p>
+            <a:pPr>
+              <a:spcAft>
+                <a:spcPts val="600"/>
+              </a:spcAft>
+            </a:pPr>
+            <a:r>
+              <a:rPr sz="1500">
+                <a:solidFill>
+                  <a:srgbClr val="22282E"/>
+                </a:solidFill>
+              </a:rPr>
+              <a:t>•  Capturar contraseñas en portal — impacto innecesario</a:t>
+            </a:r>
+          </a:p>
+          <a:p>
+            <a:pPr>
+              <a:spcAft>
+                <a:spcPts val="600"/>
+              </a:spcAft>
+            </a:pPr>
+            <a:r>
+              <a:rPr sz="1500">
+                <a:solidFill>
+                  <a:srgbClr val="22282E"/>
+                </a:solidFill>
+              </a:rPr>
+              <a:t>•  Generalizar funciones entre Pineapple — modelos/firmware difieren</a:t>
+            </a:r>
+          </a:p>
+          <a:p>
+            <a:pPr>
+              <a:spcAft>
+                <a:spcPts val="600"/>
+              </a:spcAft>
+            </a:pPr>
+            <a:r>
+              <a:rPr sz="1500">
+                <a:solidFill>
+                  <a:srgbClr val="22282E"/>
+                </a:solidFill>
+              </a:rPr>
+              <a:t>•  WIDS alerta todo BSSID nuevo — alta tasa de vecinos y reemplazos</a:t>
             </a:r>
           </a:p>
         </p:txBody>
@@ -3947,7 +3918,7 @@
                   <a:srgbClr val="0B3D2E"/>
                 </a:solidFill>
               </a:rPr>
-              <a:t>🔗 Referencias</a:t>
+              <a:t>❓ Preguntas frecuentes</a:t>
             </a:r>
           </a:p>
         </p:txBody>
@@ -3985,52 +3956,52 @@
                   <a:srgbClr val="22282E"/>
                 </a:solidFill>
               </a:rPr>
-              <a:t>•  Aircrack-ng: &lt;https://www.aircrack-ng.org/&gt;</a:t>
-            </a:r>
-          </a:p>
-          <a:p>
-            <a:pPr>
-              <a:spcAft>
-                <a:spcPts val="600"/>
-              </a:spcAft>
-            </a:pPr>
-            <a:r>
-              <a:rPr sz="1500">
-                <a:solidFill>
-                  <a:srgbClr val="22282E"/>
-                </a:solidFill>
-              </a:rPr>
-              <a:t>•  hcxdumptool/hcxtools: &lt;https://github.com/ZerBea/hcxdumptool&gt;</a:t>
-            </a:r>
-          </a:p>
-          <a:p>
-            <a:pPr>
-              <a:spcAft>
-                <a:spcPts val="600"/>
-              </a:spcAft>
-            </a:pPr>
-            <a:r>
-              <a:rPr sz="1500">
-                <a:solidFill>
-                  <a:srgbClr val="22282E"/>
-                </a:solidFill>
-              </a:rPr>
-              <a:t>•  hashcat (modo 22000): &lt;https://hashcat.net/wiki/doku.php?id=crackingwpawpa2&gt;</a:t>
-            </a:r>
-          </a:p>
-          <a:p>
-            <a:pPr>
-              <a:spcAft>
-                <a:spcPts val="600"/>
-              </a:spcAft>
-            </a:pPr>
-            <a:r>
-              <a:rPr sz="1500">
-                <a:solidFill>
-                  <a:srgbClr val="22282E"/>
-                </a:solidFill>
-              </a:rPr>
-              <a:t>•  Hacking Exposed Wireless — Joshua Wright, Johnny Cache.</a:t>
+              <a:t>•  ¿Capturar un handshake rompe WPA2? No. Permite verificar candidatas offline bajo condiciones concretas. Una contraseña fuerte fuera del conjunto no se revela.</a:t>
+            </a:r>
+          </a:p>
+          <a:p>
+            <a:pPr>
+              <a:spcAft>
+                <a:spcPts val="600"/>
+              </a:spcAft>
+            </a:pPr>
+            <a:r>
+              <a:rPr sz="1500">
+                <a:solidFill>
+                  <a:srgbClr val="22282E"/>
+                </a:solidFill>
+              </a:rPr>
+              <a:t>•  ¿PMF evita Evil Twin? No por sí solo. Protege ciertos frames de gestión una vez establecida la seguridad; la autenticación de red/perfil sigue siendo esencial.</a:t>
+            </a:r>
+          </a:p>
+          <a:p>
+            <a:pPr>
+              <a:spcAft>
+                <a:spcPts val="600"/>
+              </a:spcAft>
+            </a:pPr>
+            <a:r>
+              <a:rPr sz="1500">
+                <a:solidFill>
+                  <a:srgbClr val="22282E"/>
+                </a:solidFill>
+              </a:rPr>
+              <a:t>•  ¿WiFi Pineapple es necesario? No. APs propios, hostapd y un adaptador monitor permiten aprender el mecanismo. Pineapple integra flujos y facilita comparar administración/telemetría.</a:t>
+            </a:r>
+          </a:p>
+          <a:p>
+            <a:pPr>
+              <a:spcAft>
+                <a:spcPts val="600"/>
+              </a:spcAft>
+            </a:pPr>
+            <a:r>
+              <a:rPr sz="1500">
+                <a:solidFill>
+                  <a:srgbClr val="22282E"/>
+                </a:solidFill>
+              </a:rPr>
+              <a:t>•  ¿Puedo leer HTTPS al controlar el AP? Normalmente no: TLS sigue protegiendo contenido si el cliente valida certificados. Controlar la red no concede claves de aplicación.</a:t>
             </a:r>
           </a:p>
         </p:txBody>
@@ -4061,6 +4032,185 @@
         </p:nvSpPr>
         <p:spPr>
           <a:xfrm>
+            <a:off x="457200" y="320040"/>
+            <a:ext cx="8229600" cy="822960"/>
+          </a:xfrm>
+          <a:prstGeom prst="rect">
+            <a:avLst/>
+          </a:prstGeom>
+          <a:noFill/>
+        </p:spPr>
+        <p:txBody>
+          <a:bodyPr wrap="square">
+            <a:spAutoFit/>
+          </a:bodyPr>
+          <a:lstStyle/>
+          <a:p>
+            <a:r>
+              <a:rPr sz="2600" b="1">
+                <a:solidFill>
+                  <a:srgbClr val="0B3D2E"/>
+                </a:solidFill>
+              </a:rPr>
+              <a:t>🔗 Referencias verificables y alcance</a:t>
+            </a:r>
+          </a:p>
+        </p:txBody>
+      </p:sp>
+      <p:sp>
+        <p:nvSpPr>
+          <p:cNvPr id="3" name="TextBox 2"/>
+          <p:cNvSpPr txBox="1"/>
+          <p:nvPr/>
+        </p:nvSpPr>
+        <p:spPr>
+          <a:xfrm>
+            <a:off x="457200" y="1280160"/>
+            <a:ext cx="8229600" cy="4937760"/>
+          </a:xfrm>
+          <a:prstGeom prst="rect">
+            <a:avLst/>
+          </a:prstGeom>
+          <a:noFill/>
+        </p:spPr>
+        <p:txBody>
+          <a:bodyPr wrap="square">
+            <a:spAutoFit/>
+          </a:bodyPr>
+          <a:lstStyle/>
+          <a:p>
+            <a:pPr>
+              <a:spcAft>
+                <a:spcPts val="600"/>
+              </a:spcAft>
+            </a:pPr>
+            <a:r>
+              <a:rPr sz="1500">
+                <a:solidFill>
+                  <a:srgbClr val="22282E"/>
+                </a:solidFill>
+              </a:rPr>
+              <a:t>•  IEEE, 802.11 — base normativa de MAC/PHY; acceso completo puede requerir licencia.</a:t>
+            </a:r>
+          </a:p>
+          <a:p>
+            <a:pPr>
+              <a:spcAft>
+                <a:spcPts val="600"/>
+              </a:spcAft>
+            </a:pPr>
+            <a:r>
+              <a:rPr sz="1500">
+                <a:solidFill>
+                  <a:srgbClr val="22282E"/>
+                </a:solidFill>
+              </a:rPr>
+              <a:t>•  Wi-Fi Alliance, WPA3 — SAE y PMF en certificación WiFi; la configuración concreta importa.</a:t>
+            </a:r>
+          </a:p>
+          <a:p>
+            <a:pPr>
+              <a:spcAft>
+                <a:spcPts val="600"/>
+              </a:spcAft>
+            </a:pPr>
+            <a:r>
+              <a:rPr sz="1500">
+                <a:solidFill>
+                  <a:srgbClr val="22282E"/>
+                </a:solidFill>
+              </a:rPr>
+              <a:t>•  Wireshark, Display Filter Reference: WLAN — nombres reales de campos para filtros reproducibles.</a:t>
+            </a:r>
+          </a:p>
+          <a:p>
+            <a:pPr>
+              <a:spcAft>
+                <a:spcPts val="600"/>
+              </a:spcAft>
+            </a:pPr>
+            <a:r>
+              <a:rPr sz="1500">
+                <a:solidFill>
+                  <a:srgbClr val="22282E"/>
+                </a:solidFill>
+              </a:rPr>
+              <a:t>•  hostapd, documentación y código — AP software y autenticación para bancos controlados.</a:t>
+            </a:r>
+          </a:p>
+          <a:p>
+            <a:pPr>
+              <a:spcAft>
+                <a:spcPts val="600"/>
+              </a:spcAft>
+            </a:pPr>
+            <a:r>
+              <a:rPr sz="1500">
+                <a:solidFill>
+                  <a:srgbClr val="22282E"/>
+                </a:solidFill>
+              </a:rPr>
+              <a:t>•  Hak5, WiFi Pineapple Mark VII: UI, Recon/handshakes y manual Mark VII — funciones del modelo/firmware documentado, incluida la advertencia de uso de deauth.</a:t>
+            </a:r>
+          </a:p>
+          <a:p>
+            <a:pPr>
+              <a:spcAft>
+                <a:spcPts val="600"/>
+              </a:spcAft>
+            </a:pPr>
+            <a:r>
+              <a:rPr sz="1500">
+                <a:solidFill>
+                  <a:srgbClr val="22282E"/>
+                </a:solidFill>
+              </a:rPr>
+              <a:t>•  NIST, SP 800-153 — seguridad de WLAN, configuración, monitoreo y rogue AP.</a:t>
+            </a:r>
+          </a:p>
+          <a:p>
+            <a:pPr>
+              <a:spcAft>
+                <a:spcPts val="600"/>
+              </a:spcAft>
+            </a:pPr>
+            <a:r>
+              <a:rPr sz="1500">
+                <a:solidFill>
+                  <a:srgbClr val="22282E"/>
+                </a:solidFill>
+              </a:rPr>
+              <a:t>•  NIST, SP 800-97 — fundamentos de seguridad IEEE 802.11; se complementa con estándares posteriores.</a:t>
+            </a:r>
+          </a:p>
+        </p:txBody>
+      </p:sp>
+    </p:spTree>
+  </p:cSld>
+  <p:clrMapOvr>
+    <a:masterClrMapping/>
+  </p:clrMapOvr>
+</p:sld>
+</file>
+
+<file path=ppt/slides/slide17.xml><?xml version="1.0" encoding="utf-8"?>
+<p:sld xmlns:a="http://schemas.openxmlformats.org/drawingml/2006/main" xmlns:p="http://schemas.openxmlformats.org/presentationml/2006/main" xmlns:r="http://schemas.openxmlformats.org/officeDocument/2006/relationships">
+  <p:cSld>
+    <p:spTree>
+      <p:nvGrpSpPr>
+        <p:cNvPr id="1" name=""/>
+        <p:cNvGrpSpPr/>
+        <p:nvPr/>
+      </p:nvGrpSpPr>
+      <p:grpSpPr/>
+      <p:sp>
+        <p:nvSpPr>
+          <p:cNvPr id="2" name="TextBox 1"/>
+          <p:cNvSpPr txBox="1"/>
+          <p:nvPr/>
+        </p:nvSpPr>
+        <p:spPr>
+          <a:xfrm>
             <a:off x="457200" y="274320"/>
             <a:ext cx="8229600" cy="640080"/>
           </a:xfrm>
@@ -4088,7 +4238,7 @@
       </p:sp>
       <p:pic>
         <p:nvPicPr>
-          <p:cNvPr id="3" name="Picture 2" descr="b51c86e451273b67.png"/>
+          <p:cNvPr id="3" name="Picture 2" descr="bdaa62f8fa8dd800.png"/>
           <p:cNvPicPr>
             <a:picLocks noChangeAspect="1"/>
           </p:cNvPicPr>
@@ -4102,8 +4252,8 @@
         </p:blipFill>
         <p:spPr>
           <a:xfrm>
-            <a:off x="457200" y="2093976"/>
-            <a:ext cx="8229600" cy="3310128"/>
+            <a:off x="457200" y="2645864"/>
+            <a:ext cx="8229600" cy="2206352"/>
           </a:xfrm>
           <a:prstGeom prst="rect">
             <a:avLst/>
@@ -4194,7 +4344,7 @@
                   <a:srgbClr val="22282E"/>
                 </a:solidFill>
               </a:rPr>
-              <a:t>•  Ejecutar ataques modernos contra redes WiFi WPA2/WPA3-PSK en un entorno propio y controlado: captura del handshake de 4 vías y del PMKID (sin necesidad de clientes conectados), crackeo offline con…</a:t>
+              <a:t>•  Evaluar en un laboratorio aislado cómo los clientes eligen una red WiFi, qué demuestra una captura de autenticación y cómo detectar puntos de acceso no autorizados. WiFi Pineapple se estudia como…</a:t>
             </a:r>
           </a:p>
         </p:txBody>
@@ -4298,82 +4448,82 @@
                   <a:srgbClr val="22282E"/>
                 </a:solidFill>
               </a:rPr>
-              <a:t>•  Poner una tarjeta WiFi en modo monitor y capturar tráfico 802.11.</a:t>
-            </a:r>
-          </a:p>
-          <a:p>
-            <a:pPr>
-              <a:spcAft>
-                <a:spcPts val="600"/>
-              </a:spcAft>
-            </a:pPr>
-            <a:r>
-              <a:rPr sz="1500">
-                <a:solidFill>
-                  <a:srgbClr val="22282E"/>
-                </a:solidFill>
-              </a:rPr>
-              <a:t>•  Capturar un handshake WPA2 de 4 vías y un PMKID.</a:t>
-            </a:r>
-          </a:p>
-          <a:p>
-            <a:pPr>
-              <a:spcAft>
-                <a:spcPts val="600"/>
-              </a:spcAft>
-            </a:pPr>
-            <a:r>
-              <a:rPr sz="1500">
-                <a:solidFill>
-                  <a:srgbClr val="22282E"/>
-                </a:solidFill>
-              </a:rPr>
-              <a:t>•  Crackear el hash resultante offline con hashcat.</a:t>
-            </a:r>
-          </a:p>
-          <a:p>
-            <a:pPr>
-              <a:spcAft>
-                <a:spcPts val="600"/>
-              </a:spcAft>
-            </a:pPr>
-            <a:r>
-              <a:rPr sz="1500">
-                <a:solidFill>
-                  <a:srgbClr val="22282E"/>
-                </a:solidFill>
-              </a:rPr>
-              <a:t>•  Montar un Evil Twin con portal cautivo en laboratorio.</a:t>
-            </a:r>
-          </a:p>
-          <a:p>
-            <a:pPr>
-              <a:spcAft>
-                <a:spcPts val="600"/>
-              </a:spcAft>
-            </a:pPr>
-            <a:r>
-              <a:rPr sz="1500">
-                <a:solidFill>
-                  <a:srgbClr val="22282E"/>
-                </a:solidFill>
-              </a:rPr>
-              <a:t>•  Explicar por qué WPA3-SAE mitiga el crackeo offline.</a:t>
-            </a:r>
-          </a:p>
-          <a:p>
-            <a:pPr>
-              <a:spcAft>
-                <a:spcPts val="600"/>
-              </a:spcAft>
-            </a:pPr>
-            <a:r>
-              <a:rPr sz="1500">
-                <a:solidFill>
-                  <a:srgbClr val="22282E"/>
-                </a:solidFill>
-              </a:rPr>
-              <a:t>•  Recomendar defensas (contraseñas fuertes, WPA3, 802.1X, PMF).</a:t>
+              <a:t>•  Explicar SSID, BSSID, canal, RSN, autenticación, asociación, 4-way handshake, PMKID, SAE y PMF.</a:t>
+            </a:r>
+          </a:p>
+          <a:p>
+            <a:pPr>
+              <a:spcAft>
+                <a:spcPts val="600"/>
+              </a:spcAft>
+            </a:pPr>
+            <a:r>
+              <a:rPr sz="1500">
+                <a:solidFill>
+                  <a:srgbClr val="22282E"/>
+                </a:solidFill>
+              </a:rPr>
+              <a:t>•  Distinguir observación pasiva, conexión a una red, captura de frames e interpretación del contenido.</a:t>
+            </a:r>
+          </a:p>
+          <a:p>
+            <a:pPr>
+              <a:spcAft>
+                <a:spcPts val="600"/>
+              </a:spcAft>
+            </a:pPr>
+            <a:r>
+              <a:rPr sz="1500">
+                <a:solidFill>
+                  <a:srgbClr val="22282E"/>
+                </a:solidFill>
+              </a:rPr>
+              <a:t>•  Configurar y administrar un AP de laboratorio o WiFi Pineapple con firmware, país, red de gestión, filtros, credenciales y restauración.</a:t>
+            </a:r>
+          </a:p>
+          <a:p>
+            <a:pPr>
+              <a:spcAft>
+                <a:spcPts val="600"/>
+              </a:spcAft>
+            </a:pPr>
+            <a:r>
+              <a:rPr sz="1500">
+                <a:solidFill>
+                  <a:srgbClr val="22282E"/>
+                </a:solidFill>
+              </a:rPr>
+              <a:t>•  Construir un Evil Twin inocuo con clientes propios y portal sin captura de datos.</a:t>
+            </a:r>
+          </a:p>
+          <a:p>
+            <a:pPr>
+              <a:spcAft>
+                <a:spcPts val="600"/>
+              </a:spcAft>
+            </a:pPr>
+            <a:r>
+              <a:rPr sz="1500">
+                <a:solidFill>
+                  <a:srgbClr val="22282E"/>
+                </a:solidFill>
+              </a:rPr>
+              <a:t>•  Capturar una asociación iniciada manualmente y evaluar una contraseña sintética offline.</a:t>
+            </a:r>
+          </a:p>
+          <a:p>
+            <a:pPr>
+              <a:spcAft>
+                <a:spcPts val="600"/>
+              </a:spcAft>
+            </a:pPr>
+            <a:r>
+              <a:rPr sz="1500">
+                <a:solidFill>
+                  <a:srgbClr val="22282E"/>
+                </a:solidFill>
+              </a:rPr>
+              <a:t>•  Detectar un AP no autorizado correlacionando inventario, beacon/RSN, infraestructura y comportamiento del cliente.</a:t>
             </a:r>
           </a:p>
         </p:txBody>
@@ -4462,97 +4612,97 @@
                   <a:srgbClr val="22282E"/>
                 </a:solidFill>
               </a:rPr>
-              <a:t>•  1 — 802.11, modo monitor e inyección</a:t>
-            </a:r>
-          </a:p>
-          <a:p>
-            <a:pPr>
-              <a:spcAft>
-                <a:spcPts val="600"/>
-              </a:spcAft>
-            </a:pPr>
-            <a:r>
-              <a:rPr sz="1500">
-                <a:solidFill>
-                  <a:srgbClr val="22282E"/>
-                </a:solidFill>
-              </a:rPr>
-              <a:t>•  2 — Handshake WPA2 de 4 vías</a:t>
-            </a:r>
-          </a:p>
-          <a:p>
-            <a:pPr>
-              <a:spcAft>
-                <a:spcPts val="600"/>
-              </a:spcAft>
-            </a:pPr>
-            <a:r>
-              <a:rPr sz="1500">
-                <a:solidFill>
-                  <a:srgbClr val="22282E"/>
-                </a:solidFill>
-              </a:rPr>
-              <a:t>•  3 — Ataque PMKID (clientless)</a:t>
-            </a:r>
-          </a:p>
-          <a:p>
-            <a:pPr>
-              <a:spcAft>
-                <a:spcPts val="600"/>
-              </a:spcAft>
-            </a:pPr>
-            <a:r>
-              <a:rPr sz="1500">
-                <a:solidFill>
-                  <a:srgbClr val="22282E"/>
-                </a:solidFill>
-              </a:rPr>
-              <a:t>•  4 — Crackeo con hashcat</a:t>
-            </a:r>
-          </a:p>
-          <a:p>
-            <a:pPr>
-              <a:spcAft>
-                <a:spcPts val="600"/>
-              </a:spcAft>
-            </a:pPr>
-            <a:r>
-              <a:rPr sz="1500">
-                <a:solidFill>
-                  <a:srgbClr val="22282E"/>
-                </a:solidFill>
-              </a:rPr>
-              <a:t>•  5 — Evil Twin y portal cautivo</a:t>
-            </a:r>
-          </a:p>
-          <a:p>
-            <a:pPr>
-              <a:spcAft>
-                <a:spcPts val="600"/>
-              </a:spcAft>
-            </a:pPr>
-            <a:r>
-              <a:rPr sz="1500">
-                <a:solidFill>
-                  <a:srgbClr val="22282E"/>
-                </a:solidFill>
-              </a:rPr>
-              <a:t>•  6 — WPA3-SAE y PMF</a:t>
-            </a:r>
-          </a:p>
-          <a:p>
-            <a:pPr>
-              <a:spcAft>
-                <a:spcPts val="600"/>
-              </a:spcAft>
-            </a:pPr>
-            <a:r>
-              <a:rPr sz="1500">
-                <a:solidFill>
-                  <a:srgbClr val="22282E"/>
-                </a:solidFill>
-              </a:rPr>
-              <a:t>•  7 — Defensas y detección</a:t>
+              <a:t>•  1 — Identidad WiFi</a:t>
+            </a:r>
+          </a:p>
+          <a:p>
+            <a:pPr>
+              <a:spcAft>
+                <a:spcPts val="600"/>
+              </a:spcAft>
+            </a:pPr>
+            <a:r>
+              <a:rPr sz="1500">
+                <a:solidFill>
+                  <a:srgbClr val="22282E"/>
+                </a:solidFill>
+              </a:rPr>
+              <a:t>•  2 — Captura y cifrado</a:t>
+            </a:r>
+          </a:p>
+          <a:p>
+            <a:pPr>
+              <a:spcAft>
+                <a:spcPts val="600"/>
+              </a:spcAft>
+            </a:pPr>
+            <a:r>
+              <a:rPr sz="1500">
+                <a:solidFill>
+                  <a:srgbClr val="22282E"/>
+                </a:solidFill>
+              </a:rPr>
+              <a:t>•  3 — Handshake/PMKID</a:t>
+            </a:r>
+          </a:p>
+          <a:p>
+            <a:pPr>
+              <a:spcAft>
+                <a:spcPts val="600"/>
+              </a:spcAft>
+            </a:pPr>
+            <a:r>
+              <a:rPr sz="1500">
+                <a:solidFill>
+                  <a:srgbClr val="22282E"/>
+                </a:solidFill>
+              </a:rPr>
+              <a:t>•  4 — Evil Twin</a:t>
+            </a:r>
+          </a:p>
+          <a:p>
+            <a:pPr>
+              <a:spcAft>
+                <a:spcPts val="600"/>
+              </a:spcAft>
+            </a:pPr>
+            <a:r>
+              <a:rPr sz="1500">
+                <a:solidFill>
+                  <a:srgbClr val="22282E"/>
+                </a:solidFill>
+              </a:rPr>
+              <a:t>•  5 — WiFi Pineapple</a:t>
+            </a:r>
+          </a:p>
+          <a:p>
+            <a:pPr>
+              <a:spcAft>
+                <a:spcPts val="600"/>
+              </a:spcAft>
+            </a:pPr>
+            <a:r>
+              <a:rPr sz="1500">
+                <a:solidFill>
+                  <a:srgbClr val="22282E"/>
+                </a:solidFill>
+              </a:rPr>
+              <a:t>•  6 — Detección</a:t>
+            </a:r>
+          </a:p>
+          <a:p>
+            <a:pPr>
+              <a:spcAft>
+                <a:spcPts val="600"/>
+              </a:spcAft>
+            </a:pPr>
+            <a:r>
+              <a:rPr sz="1500">
+                <a:solidFill>
+                  <a:srgbClr val="22282E"/>
+                </a:solidFill>
+              </a:rPr>
+              <a:t>•  7 — Controles</a:t>
             </a:r>
           </a:p>
         </p:txBody>
@@ -4641,52 +4791,97 @@
                   <a:srgbClr val="22282E"/>
                 </a:solidFill>
               </a:rPr>
-              <a:t>•  En WPA2-Personal, la clave de red deriva de la contraseña y SSID; el handshake demuestra posesión sin transmitirla directamente. Una captura suficiente permite comprobar candidatos offline, por lo…</a:t>
-            </a:r>
-          </a:p>
-          <a:p>
-            <a:pPr>
-              <a:spcAft>
-                <a:spcPts val="600"/>
-              </a:spcAft>
-            </a:pPr>
-            <a:r>
-              <a:rPr sz="1500">
-                <a:solidFill>
-                  <a:srgbClr val="22282E"/>
-                </a:solidFill>
-              </a:rPr>
-              <a:t>•  Un Evil Twin explota selección de red y confianza del usuario. En empresa, validar el certificado del servidor EAP y desplegar perfiles gestionados evita aceptar un autenticador impostor. En redes…</a:t>
-            </a:r>
-          </a:p>
-          <a:p>
-            <a:pPr>
-              <a:spcAft>
-                <a:spcPts val="600"/>
-              </a:spcAft>
-            </a:pPr>
-            <a:r>
-              <a:rPr sz="1500">
-                <a:solidFill>
-                  <a:srgbClr val="22282E"/>
-                </a:solidFill>
-              </a:rPr>
-              <a:t>•  El laboratorio usa AP, cliente y canal propios dentro de un entorno controlado. No se desautentican equipos ajenos: la reconexión se provoca manualmente o con el propio cliente. Las listas de prueba…</a:t>
-            </a:r>
-          </a:p>
-          <a:p>
-            <a:pPr>
-              <a:spcAft>
-                <a:spcPts val="600"/>
-              </a:spcAft>
-            </a:pPr>
-            <a:r>
-              <a:rPr sz="1500">
-                <a:solidFill>
-                  <a:srgbClr val="22282E"/>
-                </a:solidFill>
-              </a:rPr>
-              <a:t>•  Un AP anuncia WPA2/WPA3 para compatibilidad. Un cliente antiguo usa WPA2 y conserva riesgo de PSK débil; otro usa SAE. El informe no declara «WPA3 roto», sino que identifica negociación por cliente y…</a:t>
+              <a:t>•  El SSID es el nombre de red que el usuario reconoce; múltiples AP legítimos pueden compartirlo. El BSSID suele identificar una interfaz de radio concreta, pero puede modificarse. Los beacons anuncian…</a:t>
+            </a:r>
+          </a:p>
+          <a:p>
+            <a:pPr>
+              <a:spcAft>
+                <a:spcPts val="600"/>
+              </a:spcAft>
+            </a:pPr>
+            <a:r>
+              <a:rPr sz="1500">
+                <a:solidFill>
+                  <a:srgbClr val="22282E"/>
+                </a:solidFill>
+              </a:rPr>
+              <a:t>•  Un Evil Twin reproduce suficientes señales de una red esperada para atraer conexiones. Puede ser abierto, usar una contraseña de laboratorio conocida o imitar una configuración Enterprise en un…</a:t>
+            </a:r>
+          </a:p>
+          <a:p>
+            <a:pPr>
+              <a:spcAft>
+                <a:spcPts val="600"/>
+              </a:spcAft>
+            </a:pPr>
+            <a:r>
+              <a:rPr sz="1500">
+                <a:solidFill>
+                  <a:srgbClr val="22282E"/>
+                </a:solidFill>
+              </a:rPr>
+              <a:t>•  El diagrama muestra dos planos. El cliente toma una decisión con datos que pueden o no autenticar la red; el defensor observa radio e infraestructura. Ver dos BSSID para un SSID no basta para…</a:t>
+            </a:r>
+          </a:p>
+          <a:p>
+            <a:pPr>
+              <a:spcAft>
+                <a:spcPts val="600"/>
+              </a:spcAft>
+            </a:pPr>
+            <a:r>
+              <a:rPr sz="1500">
+                <a:solidFill>
+                  <a:srgbClr val="22282E"/>
+                </a:solidFill>
+              </a:rPr>
+              <a:t>•  En modo monitor, un adaptador recibe frames del canal y ancho configurados. Puede perder frames de otros canales, por señal débil, saturación o capacidades del driver. Los frames de gestión revelan…</a:t>
+            </a:r>
+          </a:p>
+          <a:p>
+            <a:pPr>
+              <a:spcAft>
+                <a:spcPts val="600"/>
+              </a:spcAft>
+            </a:pPr>
+            <a:r>
+              <a:rPr sz="1500">
+                <a:solidFill>
+                  <a:srgbClr val="22282E"/>
+                </a:solidFill>
+              </a:rPr>
+              <a:t>•  Incluso tras descifrar la capa WiFi, TLS u otro cifrado de aplicación sigue protegiendo payload. Asociarse a un AP tampoco concede acceso a Internet, a una VLAN interna ni a datos. Son afirmaciones…</a:t>
+            </a:r>
+          </a:p>
+          <a:p>
+            <a:pPr>
+              <a:spcAft>
+                <a:spcPts val="600"/>
+              </a:spcAft>
+            </a:pPr>
+            <a:r>
+              <a:rPr sz="1500">
+                <a:solidFill>
+                  <a:srgbClr val="22282E"/>
+                </a:solidFill>
+              </a:rPr>
+              <a:t>•  En WPA2-Personal, la contraseña y el SSID intervienen en la derivación de material de clave. Un 4-way handshake contiene nonces e integridad suficientes para comprobar offline si una candidata…</a:t>
+            </a:r>
+          </a:p>
+          <a:p>
+            <a:pPr>
+              <a:spcAft>
+                <a:spcPts val="600"/>
+              </a:spcAft>
+            </a:pPr>
+            <a:r>
+              <a:rPr sz="1500">
+                <a:solidFill>
+                  <a:srgbClr val="22282E"/>
+                </a:solidFill>
+              </a:rPr>
+              <a:t>•  WPA3-Personal usa SAE, diseñado para resistir el ataque pasivo offline basado en una sola captura que caracteriza WPA2-PSK. Modo transición puede seguir ofreciendo WPA2 y ampliar superficie.…</a:t>
             </a:r>
           </a:p>
         </p:txBody>
@@ -4737,7 +4932,7 @@
                   <a:srgbClr val="0B3D2E"/>
                 </a:solidFill>
               </a:rPr>
-              <a:t>📔 Glosario operativo</a:t>
+              <a:t>📖 Definiciones y características</a:t>
             </a:r>
           </a:p>
         </p:txBody>
@@ -4775,82 +4970,97 @@
                   <a:srgbClr val="22282E"/>
                 </a:solidFill>
               </a:rPr>
-              <a:t>•  Término — Definición útil</a:t>
-            </a:r>
-          </a:p>
-          <a:p>
-            <a:pPr>
-              <a:spcAft>
-                <a:spcPts val="600"/>
-              </a:spcAft>
-            </a:pPr>
-            <a:r>
-              <a:rPr sz="1500">
-                <a:solidFill>
-                  <a:srgbClr val="22282E"/>
-                </a:solidFill>
-              </a:rPr>
-              <a:t>•  4-way handshake — Intercambio que confirma claves y deriva claves de sesión.</a:t>
-            </a:r>
-          </a:p>
-          <a:p>
-            <a:pPr>
-              <a:spcAft>
-                <a:spcPts val="600"/>
-              </a:spcAft>
-            </a:pPr>
-            <a:r>
-              <a:rPr sz="1500">
-                <a:solidFill>
-                  <a:srgbClr val="22282E"/>
-                </a:solidFill>
-              </a:rPr>
-              <a:t>•  PMKID — Identificador derivado que algunas configuraciones exponen para gestión de claves.</a:t>
-            </a:r>
-          </a:p>
-          <a:p>
-            <a:pPr>
-              <a:spcAft>
-                <a:spcPts val="600"/>
-              </a:spcAft>
-            </a:pPr>
-            <a:r>
-              <a:rPr sz="1500">
-                <a:solidFill>
-                  <a:srgbClr val="22282E"/>
-                </a:solidFill>
-              </a:rPr>
-              <a:t>•  SAE — Autenticación basada en contraseña usada por WPA3-Personal.</a:t>
-            </a:r>
-          </a:p>
-          <a:p>
-            <a:pPr>
-              <a:spcAft>
-                <a:spcPts val="600"/>
-              </a:spcAft>
-            </a:pPr>
-            <a:r>
-              <a:rPr sz="1500">
-                <a:solidFill>
-                  <a:srgbClr val="22282E"/>
-                </a:solidFill>
-              </a:rPr>
-              <a:t>•  PMF — Protección de ciertas tramas de gestión IEEE 802.11.</a:t>
-            </a:r>
-          </a:p>
-          <a:p>
-            <a:pPr>
-              <a:spcAft>
-                <a:spcPts val="600"/>
-              </a:spcAft>
-            </a:pPr>
-            <a:r>
-              <a:rPr sz="1500">
-                <a:solidFill>
-                  <a:srgbClr val="22282E"/>
-                </a:solidFill>
-              </a:rPr>
-              <a:t>•  Evil Twin — AP impostor que imita identidad de una red.</a:t>
+              <a:t>•  SSID: nombre lógico de red; no autentica al operador.</a:t>
+            </a:r>
+          </a:p>
+          <a:p>
+            <a:pPr>
+              <a:spcAft>
+                <a:spcPts val="600"/>
+              </a:spcAft>
+            </a:pPr>
+            <a:r>
+              <a:rPr sz="1500">
+                <a:solidFill>
+                  <a:srgbClr val="22282E"/>
+                </a:solidFill>
+              </a:rPr>
+              <a:t>•  BSSID: identificador de una interfaz/AP en una BSS; útil para correlación, falsificable.</a:t>
+            </a:r>
+          </a:p>
+          <a:p>
+            <a:pPr>
+              <a:spcAft>
+                <a:spcPts val="600"/>
+              </a:spcAft>
+            </a:pPr>
+            <a:r>
+              <a:rPr sz="1500">
+                <a:solidFill>
+                  <a:srgbClr val="22282E"/>
+                </a:solidFill>
+              </a:rPr>
+              <a:t>•  RSN: información de seguridad anunciada/negociada para WPA2/WPA3.</a:t>
+            </a:r>
+          </a:p>
+          <a:p>
+            <a:pPr>
+              <a:spcAft>
+                <a:spcPts val="600"/>
+              </a:spcAft>
+            </a:pPr>
+            <a:r>
+              <a:rPr sz="1500">
+                <a:solidFill>
+                  <a:srgbClr val="22282E"/>
+                </a:solidFill>
+              </a:rPr>
+              <a:t>•  4-way handshake: confirma material de clave y deriva claves temporales; no transporta la contraseña en claro.</a:t>
+            </a:r>
+          </a:p>
+          <a:p>
+            <a:pPr>
+              <a:spcAft>
+                <a:spcPts val="600"/>
+              </a:spcAft>
+            </a:pPr>
+            <a:r>
+              <a:rPr sz="1500">
+                <a:solidFill>
+                  <a:srgbClr val="22282E"/>
+                </a:solidFill>
+              </a:rPr>
+              <a:t>•  PMKID: identificador derivado de PMK y participantes; su disponibilidad/utilidad depende de configuración.</a:t>
+            </a:r>
+          </a:p>
+          <a:p>
+            <a:pPr>
+              <a:spcAft>
+                <a:spcPts val="600"/>
+              </a:spcAft>
+            </a:pPr>
+            <a:r>
+              <a:rPr sz="1500">
+                <a:solidFill>
+                  <a:srgbClr val="22282E"/>
+                </a:solidFill>
+              </a:rPr>
+              <a:t>•  SAE: intercambio autenticado usado por WPA3-Personal, resistente a verificación pasiva offline tradicional.</a:t>
+            </a:r>
+          </a:p>
+          <a:p>
+            <a:pPr>
+              <a:spcAft>
+                <a:spcPts val="600"/>
+              </a:spcAft>
+            </a:pPr>
+            <a:r>
+              <a:rPr sz="1500">
+                <a:solidFill>
+                  <a:srgbClr val="22282E"/>
+                </a:solidFill>
+              </a:rPr>
+              <a:t>•  PMF: protección de determinados frames de gestión; opcional/requerida según modo.</a:t>
             </a:r>
           </a:p>
         </p:txBody>
@@ -4901,7 +5111,7 @@
                   <a:srgbClr val="0B3D2E"/>
                 </a:solidFill>
               </a:rPr>
-              <a:t>✅ Criterio de dominio</a:t>
+              <a:t>📔 Glosario operativo</a:t>
             </a:r>
           </a:p>
         </p:txBody>
@@ -4939,7 +5149,97 @@
                   <a:srgbClr val="22282E"/>
                 </a:solidFill>
               </a:rPr>
-              <a:t>•  Existe dominio cuando el alumno explica qué prueba una captura, diferencia WPA2, SAE y PMF, ejecuta la demostración sin afectar terceros y recomienda controles según tipo de red y clientes.</a:t>
+              <a:t>•  Término — Definición útil</a:t>
+            </a:r>
+          </a:p>
+          <a:p>
+            <a:pPr>
+              <a:spcAft>
+                <a:spcPts val="600"/>
+              </a:spcAft>
+            </a:pPr>
+            <a:r>
+              <a:rPr sz="1500">
+                <a:solidFill>
+                  <a:srgbClr val="22282E"/>
+                </a:solidFill>
+              </a:rPr>
+              <a:t>•  Beacon — Frame periódico con identidad y capacidades del AP.</a:t>
+            </a:r>
+          </a:p>
+          <a:p>
+            <a:pPr>
+              <a:spcAft>
+                <a:spcPts val="600"/>
+              </a:spcAft>
+            </a:pPr>
+            <a:r>
+              <a:rPr sz="1500">
+                <a:solidFill>
+                  <a:srgbClr val="22282E"/>
+                </a:solidFill>
+              </a:rPr>
+              <a:t>•  Probe — Solicitud/respuesta de descubrimiento; el comportamiento depende del cliente.</a:t>
+            </a:r>
+          </a:p>
+          <a:p>
+            <a:pPr>
+              <a:spcAft>
+                <a:spcPts val="600"/>
+              </a:spcAft>
+            </a:pPr>
+            <a:r>
+              <a:rPr sz="1500">
+                <a:solidFill>
+                  <a:srgbClr val="22282E"/>
+                </a:solidFill>
+              </a:rPr>
+              <a:t>•  Association — Paso por el que cliente y AP establecen relación 802.11; no garantiza acceso superior.</a:t>
+            </a:r>
+          </a:p>
+          <a:p>
+            <a:pPr>
+              <a:spcAft>
+                <a:spcPts val="600"/>
+              </a:spcAft>
+            </a:pPr>
+            <a:r>
+              <a:rPr sz="1500">
+                <a:solidFill>
+                  <a:srgbClr val="22282E"/>
+                </a:solidFill>
+              </a:rPr>
+              <a:t>•  Radiotap — Metadatos de captura como canal, tasa y RSSI aportados por el driver.</a:t>
+            </a:r>
+          </a:p>
+          <a:p>
+            <a:pPr>
+              <a:spcAft>
+                <a:spcPts val="600"/>
+              </a:spcAft>
+            </a:pPr>
+            <a:r>
+              <a:rPr sz="1500">
+                <a:solidFill>
+                  <a:srgbClr val="22282E"/>
+                </a:solidFill>
+              </a:rPr>
+              <a:t>•  Canal — Porción del espectro; una captura fija no ve simultáneamente todos.</a:t>
+            </a:r>
+          </a:p>
+          <a:p>
+            <a:pPr>
+              <a:spcAft>
+                <a:spcPts val="600"/>
+              </a:spcAft>
+            </a:pPr>
+            <a:r>
+              <a:rPr sz="1500">
+                <a:solidFill>
+                  <a:srgbClr val="22282E"/>
+                </a:solidFill>
+              </a:rPr>
+              <a:t>•  Captive portal — Aplicación web posterior a la conexión; no es autenticación WiFi.</a:t>
             </a:r>
           </a:p>
         </p:txBody>
@@ -4990,7 +5290,7 @@
                   <a:srgbClr val="0B3D2E"/>
                 </a:solidFill>
               </a:rPr>
-              <a:t>📖 Definiciones y características</a:t>
+              <a:t>✅ Criterio de dominio</a:t>
             </a:r>
           </a:p>
         </p:txBody>
@@ -5028,82 +5328,7 @@
                   <a:srgbClr val="22282E"/>
                 </a:solidFill>
               </a:rPr>
-              <a:t>•  Modo monitor: estado del adaptador que captura todos los frames 802.11 del canal. Característica: prerequisito para sniffing e inyección.</a:t>
-            </a:r>
-          </a:p>
-          <a:p>
-            <a:pPr>
-              <a:spcAft>
-                <a:spcPts val="600"/>
-              </a:spcAft>
-            </a:pPr>
-            <a:r>
-              <a:rPr sz="1500">
-                <a:solidFill>
-                  <a:srgbClr val="22282E"/>
-                </a:solidFill>
-              </a:rPr>
-              <a:t>•  Handshake de 4 vías: intercambio WPA2 que deriva las claves de sesión a partir del PSK. Característica: capturable durante la asociación de un cliente.</a:t>
-            </a:r>
-          </a:p>
-          <a:p>
-            <a:pPr>
-              <a:spcAft>
-                <a:spcPts val="600"/>
-              </a:spcAft>
-            </a:pPr>
-            <a:r>
-              <a:rPr sz="1500">
-                <a:solidFill>
-                  <a:srgbClr val="22282E"/>
-                </a:solidFill>
-              </a:rPr>
-              <a:t>•  PMKID: identificador incluido opcionalmente por el AP en el primer mensaje EAPOL, derivado del PMK. Característica: permite crackeo offline sin clientes.</a:t>
-            </a:r>
-          </a:p>
-          <a:p>
-            <a:pPr>
-              <a:spcAft>
-                <a:spcPts val="600"/>
-              </a:spcAft>
-            </a:pPr>
-            <a:r>
-              <a:rPr sz="1500">
-                <a:solidFill>
-                  <a:srgbClr val="22282E"/>
-                </a:solidFill>
-              </a:rPr>
-              <a:t>•  hcxdumptool/hcxtools: utilidades para capturar PMKID/handshakes y convertirlos al formato de hashcat. Característica: automatizan la captura clientless.</a:t>
-            </a:r>
-          </a:p>
-          <a:p>
-            <a:pPr>
-              <a:spcAft>
-                <a:spcPts val="600"/>
-              </a:spcAft>
-            </a:pPr>
-            <a:r>
-              <a:rPr sz="1500">
-                <a:solidFill>
-                  <a:srgbClr val="22282E"/>
-                </a:solidFill>
-              </a:rPr>
-              <a:t>•  Evil Twin: AP falso que imita el SSID legítimo para atraer clientes. Característica: combinado con portal cautivo, captura credenciales.</a:t>
-            </a:r>
-          </a:p>
-          <a:p>
-            <a:pPr>
-              <a:spcAft>
-                <a:spcPts val="600"/>
-              </a:spcAft>
-            </a:pPr>
-            <a:r>
-              <a:rPr sz="1500">
-                <a:solidFill>
-                  <a:srgbClr val="22282E"/>
-                </a:solidFill>
-              </a:rPr>
-              <a:t>•  WPA3-SAE (Dragonfly): handshake con autenticación simultánea de iguales resistente a diccionario offline. Característica: elimina el crackeo del handshake capturado.</a:t>
+              <a:t>•  Hay dominio cuando el alumno explica exactamente qué contiene la captura, prueba controles sin desautenticar ni recolectar credenciales, administra/restaura el equipo y produce una alerta con esquema…</a:t>
             </a:r>
           </a:p>
         </p:txBody>
@@ -5192,22 +5417,22 @@
                   <a:srgbClr val="22282E"/>
                 </a:solidFill>
               </a:rPr>
-              <a:t>•  Adaptador WiFi con soporte de modo monitor e inyección (chipsets Atheros/Ralink/MediaTek), AP propio de laboratorio.</a:t>
-            </a:r>
-          </a:p>
-          <a:p>
-            <a:pPr>
-              <a:spcAft>
-                <a:spcPts val="600"/>
-              </a:spcAft>
-            </a:pPr>
-            <a:r>
-              <a:rPr sz="1500">
-                <a:solidFill>
-                  <a:srgbClr val="22282E"/>
-                </a:solidFill>
-              </a:rPr>
-              <a:t>•  Aircrack-ng, hcxdumptool/hcxtools, hashcat, hostapd/hostapd-mana o wifiphisher para Evil Twin.</a:t>
+              <a:t>•  Banco mínimo: dos AP/routers propios o un AP software con hostapd, un cliente desechable, adaptador monitor compatible y Wireshark. Opcional: WiFi Pineapple del modelo documentado. Aislamiento…</a:t>
+            </a:r>
+          </a:p>
+          <a:p>
+            <a:pPr>
+              <a:spcAft>
+                <a:spcPts val="600"/>
+              </a:spcAft>
+            </a:pPr>
+            <a:r>
+              <a:rPr sz="1500">
+                <a:solidFill>
+                  <a:srgbClr val="22282E"/>
+                </a:solidFill>
+              </a:rPr>
+              <a:t>•  Los nombres de campo se verifican contra la referencia de filtros de la versión instalada. Si radiotap.channel.freq no existe en la captura, no se inventa: se declara ausencia.</a:t>
             </a:r>
           </a:p>
         </p:txBody>
